--- a/Quadro_Aulas_Report_2026-06-30.pptx
+++ b/Quadro_Aulas_Report_2026-06-30.pptx
@@ -1038,7 +1038,7 @@
                   <a:srgbClr val="8FA3C0"/>
                 </a:solidFill>
               </a:rPr>
-              <a:t>30 de Junho de 2026 as 09:06</a:t>
+              <a:t>30 de Junho de 2026 as 19:04</a:t>
             </a:r>
             <a:endParaRPr lang="en-US" sz="700" dirty="0"/>
           </a:p>
@@ -1207,7 +1207,7 @@
                   <a:srgbClr val="4ADE80"/>
                 </a:solidFill>
               </a:rPr>
-              <a:t>334</a:t>
+              <a:t>335</a:t>
             </a:r>
             <a:endParaRPr lang="en-US" sz="2400" dirty="0"/>
           </a:p>
@@ -1351,7 +1351,7 @@
                   <a:srgbClr val="F87171"/>
                 </a:solidFill>
               </a:rPr>
-              <a:t>35</a:t>
+              <a:t>34</a:t>
             </a:r>
             <a:endParaRPr lang="en-US" sz="2400" dirty="0"/>
           </a:p>
@@ -1473,7 +1473,7 @@
                   <a:srgbClr val="8FA3C0"/>
                 </a:solidFill>
               </a:rPr>
-              <a:t>85% concluido  .  334 de 393 itens</a:t>
+              <a:t>85% concluido  .  335 de 393 itens</a:t>
             </a:r>
             <a:endParaRPr lang="en-US" sz="700" dirty="0"/>
           </a:p>
@@ -2263,7 +2263,7 @@
                   <a:srgbClr val="222222"/>
                 </a:solidFill>
               </a:rPr>
-              <a:t>A Fazer: 5 . Em progresso: 0 . Finalizados: 109</a:t>
+              <a:t>A Fazer: 4 . Em progresso: 0 . Finalizados: 110</a:t>
             </a:r>
             <a:endParaRPr lang="en-US" sz="750" dirty="0"/>
           </a:p>
@@ -2299,7 +2299,7 @@
                   <a:srgbClr val="222222"/>
                 </a:solidFill>
               </a:rPr>
-              <a:t>Est: 432.5h . Real: 587.6h . Rem: 8.5h</a:t>
+              <a:t>Est: 432.5h . Real: 588.1h . Rem: 8h</a:t>
             </a:r>
             <a:endParaRPr lang="en-US" sz="750" dirty="0"/>
           </a:p>
@@ -2471,7 +2471,7 @@
                   <a:srgbClr val="888888"/>
                 </a:solidFill>
               </a:rPr>
-              <a:t>Subs: 96% · 109 de 114</a:t>
+              <a:t>Subs: 96% · 110 de 114</a:t>
             </a:r>
             <a:endParaRPr lang="en-US" sz="650" dirty="0"/>
           </a:p>
@@ -3634,7 +3634,7 @@
                   <a:srgbClr val="D97706"/>
                 </a:solidFill>
               </a:rPr>
-              <a:t>1310.2h</a:t>
+              <a:t>1310.7h</a:t>
             </a:r>
             <a:endParaRPr lang="en-US" sz="2400" dirty="0"/>
           </a:p>
@@ -3767,7 +3767,7 @@
                   <a:srgbClr val="F87171"/>
                 </a:solidFill>
               </a:rPr>
-              <a:t>120.5h</a:t>
+              <a:t>120h</a:t>
             </a:r>
             <a:endParaRPr lang="en-US" sz="2400" dirty="0"/>
           </a:p>
@@ -3951,7 +3951,7 @@
         <p:spPr>
           <a:xfrm>
             <a:off x="2441448" y="2916936"/>
-            <a:ext cx="8834413" cy="54864"/>
+            <a:ext cx="8837784" cy="54864"/>
           </a:xfrm>
           <a:prstGeom prst="rect">
             <a:avLst/>
@@ -3975,8 +3975,8 @@
         </p:nvSpPr>
         <p:spPr>
           <a:xfrm>
-            <a:off x="11275861" y="2916936"/>
-            <a:ext cx="812507" cy="54864"/>
+            <a:off x="11279232" y="2916936"/>
+            <a:ext cx="809136" cy="54864"/>
           </a:xfrm>
           <a:prstGeom prst="rect">
             <a:avLst/>
@@ -5372,7 +5372,7 @@
                   <a:srgbClr val="888888"/>
                 </a:solidFill>
               </a:rPr>
-              <a:t>fixes sem card no Git · 47% do time com card</a:t>
+              <a:t>fixes sem card no Git · 46% do time com card</a:t>
             </a:r>
             <a:endParaRPr lang="en-US" sz="700" dirty="0"/>
           </a:p>
@@ -6973,7 +6973,7 @@
                   <a:srgbClr val="D85A30"/>
                 </a:solidFill>
               </a:rPr>
-              <a:t>334.5h · 52 subs finalizadas</a:t>
+              <a:t>335h · 53 subs finalizadas</a:t>
             </a:r>
             <a:endParaRPr lang="en-US" sz="950" dirty="0"/>
           </a:p>
@@ -7009,7 +7009,7 @@
                   <a:srgbClr val="888888"/>
                 </a:solidFill>
               </a:rPr>
-              <a:t>167.5h estimadas</a:t>
+              <a:t>168h estimadas</a:t>
             </a:r>
             <a:endParaRPr lang="en-US" sz="850" dirty="0"/>
           </a:p>
